--- a/Nhom_10-Nhan_Kien_Tuan.pptx
+++ b/Nhom_10-Nhan_Kien_Tuan.pptx
@@ -19,6 +19,7 @@
     <p:sldId id="267" r:id="rId13"/>
     <p:sldId id="268" r:id="rId14"/>
     <p:sldId id="269" r:id="rId15"/>
+    <p:sldId id="274" r:id="rId25"/>
     <p:sldId id="270" r:id="rId16"/>
     <p:sldId id="271" r:id="rId17"/>
     <p:sldId id="272" r:id="rId18"/>
@@ -948,7 +949,7 @@
           <a:lstStyle/>
           <a:p>
             <a:r>
-              <a:t>Kết quả trên tập test 75.000 dòng: AUROC 87.8%, AUPRC 21.8%, Accuracy 79.3%, Precision 11.3%, Recall 84.3%, F1 20.0%. Recall cao = bắt được phần lớn tấn công; Precision thấp = nhiều báo động giả do mất cân bằng ở ngưỡng 0.5. Lưu ý: nhấn AUPRC (so với baseline ngẫu nhiên ~3%) mới phản ánh chất lượng thật; Accuracy dễ gây hiểu nhầm với dữ liệu lệch lớp.</a:t>
+              <a:t>Kết quả trên tập test 36.997 dòng: AUROC 86.6%, AUPRC 22.3%, Accuracy 75.4%, Precision 9.9%, Recall 84.9%, F1 17.7%. Recall cao = bắt được phần lớn tấn công; Precision thấp = nhiều báo động giả do mất cân bằng ở ngưỡng 0.5. Lưu ý: nhấn AUPRC (so với baseline ngẫu nhiên ~3%) mới phản ánh chất lượng thật; Accuracy dễ gây hiểu nhầm với dữ liệu lệch lớp.</a:t>
             </a:r>
           </a:p>
         </p:txBody>
@@ -1206,7 +1207,7 @@
           <a:lstStyle/>
           <a:p>
             <a:r>
-              <a:t>Kết luận: hệ lai MLP + Mamdani — tri thức chuyên gia (8 luật IF-THEN) và học sâu bổ trợ lẫn nhau. Trên 500.000 lượt đăng nhập thật, mô hình đạt AUROC 0.878 và Recall 84.3%, phát hiện được phần lớn tấn công; đánh đổi báo động giả có thể điều chỉnh qua ngưỡng quyết định. Lưu ý: nhấn đóng góp và tính GIẢI THÍCH ĐƯỢC của mô hình.</a:t>
+              <a:t>Kết luận: hệ lai MLP + Mamdani — tri thức chuyên gia (8 luật IF-THEN) và học sâu bổ trợ lẫn nhau. Trên 500.000 lượt đăng nhập thật, mô hình đạt AUROC 0.866 và Recall 84.9%, phát hiện được phần lớn tấn công; đánh đổi báo động giả có thể điều chỉnh qua ngưỡng quyết định. Lưu ý: nhấn đóng góp và tính GIẢI THÍCH ĐƯỢC của mô hình.</a:t>
             </a:r>
           </a:p>
         </p:txBody>
@@ -1326,6 +1327,76 @@
         <p14:creationId xmlns:p14="http://schemas.microsoft.com/office/powerpoint/2010/main" val="1024086991"/>
       </p:ext>
     </p:extLst>
+  </p:cSld>
+  <p:clrMapOvr>
+    <a:masterClrMapping/>
+  </p:clrMapOvr>
+</p:notes>
+</file>
+
+<file path=ppt/notesSlides/notesSlide19.xml><?xml version="1.0" encoding="utf-8"?>
+<p:notes xmlns:a="http://schemas.openxmlformats.org/drawingml/2006/main" xmlns:p="http://schemas.openxmlformats.org/presentationml/2006/main" xmlns:r="http://schemas.openxmlformats.org/officeDocument/2006/relationships">
+  <p:cSld>
+    <p:spTree>
+      <p:nvGrpSpPr>
+        <p:cNvPr id="1" name=""/>
+        <p:cNvGrpSpPr/>
+        <p:nvPr/>
+      </p:nvGrpSpPr>
+      <p:grpSpPr>
+        <a:xfrm>
+          <a:off x="0" y="0"/>
+          <a:ext cx="0" cy="0"/>
+          <a:chOff x="0" y="0"/>
+          <a:chExt cx="0" cy="0"/>
+        </a:xfrm>
+      </p:grpSpPr>
+      <p:sp>
+        <p:nvSpPr>
+          <p:cNvPr id="2" name="Slide Image Placeholder 1"/>
+          <p:cNvSpPr>
+            <a:spLocks noGrp="1"/>
+          </p:cNvSpPr>
+          <p:nvPr>
+            <p:ph type="sldImg" idx="2"/>
+          </p:nvPr>
+        </p:nvSpPr>
+        <p:spPr/>
+      </p:sp>
+      <p:sp>
+        <p:nvSpPr>
+          <p:cNvPr id="3" name="Notes Placeholder 2"/>
+          <p:cNvSpPr>
+            <a:spLocks noGrp="1"/>
+          </p:cNvSpPr>
+          <p:nvPr>
+            <p:ph type="body" idx="3" sz="quarter"/>
+          </p:nvPr>
+        </p:nvSpPr>
+        <p:spPr/>
+        <p:txBody>
+          <a:bodyPr/>
+          <a:lstStyle/>
+          <a:p>
+            <a:r>
+              <a:t>Slide ablation — chứng minh nhánh mờ có đóng góp. Ta huấn luyện lại đúng kiến trúc, cách chia và seed nhưng BỎ 16 đặc trưng mờ, rồi so với mô hình đầy đủ trên cùng mẫu 246.600 dòng. Δ = (có mờ) − (không mờ): AUPRC +7.5%, Recall +2.7%, AUROC +2.1% (tăng rõ ở các chỉ số quan trọng với dữ liệu lệch lớp), Accuracy/Precision gần như không đổi. Lưu ý: nhấn rằng đặc trưng mờ là hàm phi tuyến tường minh của cùng biến thô — MLP có thể tự học một phần, nhưng mã hoá sẵn tri thức 8 luật giúp hội tụ tới tín hiệu rủi ro tốt hơn. Đây là bằng chứng định lượng cho câu hỏi 'phần mờ có thực sự cần thiết không?'.</a:t>
+            </a:r>
+          </a:p>
+        </p:txBody>
+      </p:sp>
+      <p:sp>
+        <p:nvSpPr>
+          <p:cNvPr id="4" name="Slide Number Placeholder 3"/>
+          <p:cNvSpPr>
+            <a:spLocks noGrp="1"/>
+          </p:cNvSpPr>
+          <p:nvPr>
+            <p:ph type="sldNum" idx="5" sz="quarter"/>
+          </p:nvPr>
+        </p:nvSpPr>
+        <p:spPr/>
+      </p:sp>
+    </p:spTree>
   </p:cSld>
   <p:clrMapOvr>
     <a:masterClrMapping/>
@@ -6300,7 +6371,7 @@
                 <a:ea typeface="Cambria" pitchFamily="34" charset="-122"/>
                 <a:cs typeface="Cambria" pitchFamily="34" charset="-120"/>
               </a:rPr>
-              <a:t>Đánh giá trên tập Test (75.000 dòng)</a:t>
+              <a:t>Đánh giá trên tập Test (36.997 dòng)</a:t>
             </a:r>
             <a:endParaRPr lang="en-US" sz="3200" dirty="0"/>
           </a:p>
@@ -6370,7 +6441,7 @@
                 <a:ea typeface="Cambria" pitchFamily="34" charset="-122"/>
                 <a:cs typeface="Cambria" pitchFamily="34" charset="-120"/>
               </a:rPr>
-              <a:t>87.8%</a:t>
+              <a:t>86.6%</a:t>
             </a:r>
             <a:endParaRPr lang="en-US" sz="2700" dirty="0"/>
           </a:p>
@@ -6479,7 +6550,7 @@
                 <a:ea typeface="Cambria" pitchFamily="34" charset="-122"/>
                 <a:cs typeface="Cambria" pitchFamily="34" charset="-120"/>
               </a:rPr>
-              <a:t>21.8%</a:t>
+              <a:t>22.3%</a:t>
             </a:r>
             <a:endParaRPr lang="en-US" sz="2700" dirty="0"/>
           </a:p>
@@ -6588,7 +6659,7 @@
                 <a:ea typeface="Cambria" pitchFamily="34" charset="-122"/>
                 <a:cs typeface="Cambria" pitchFamily="34" charset="-120"/>
               </a:rPr>
-              <a:t>79.3%</a:t>
+              <a:t>75.4%</a:t>
             </a:r>
             <a:endParaRPr lang="en-US" sz="2700" dirty="0"/>
           </a:p>
@@ -6697,7 +6768,7 @@
                 <a:ea typeface="Cambria" pitchFamily="34" charset="-122"/>
                 <a:cs typeface="Cambria" pitchFamily="34" charset="-120"/>
               </a:rPr>
-              <a:t>11.3%</a:t>
+              <a:t>9.9%</a:t>
             </a:r>
             <a:endParaRPr lang="en-US" sz="2700" dirty="0"/>
           </a:p>
@@ -6806,7 +6877,7 @@
                 <a:ea typeface="Cambria" pitchFamily="34" charset="-122"/>
                 <a:cs typeface="Cambria" pitchFamily="34" charset="-120"/>
               </a:rPr>
-              <a:t>84.3%</a:t>
+              <a:t>84.9%</a:t>
             </a:r>
             <a:endParaRPr lang="en-US" sz="2700" dirty="0"/>
           </a:p>
@@ -6915,7 +6986,7 @@
                 <a:ea typeface="Cambria" pitchFamily="34" charset="-122"/>
                 <a:cs typeface="Cambria" pitchFamily="34" charset="-120"/>
               </a:rPr>
-              <a:t>20.0%</a:t>
+              <a:t>17.7%</a:t>
             </a:r>
             <a:endParaRPr lang="en-US" sz="2700" dirty="0"/>
           </a:p>
@@ -6996,7 +7067,7 @@
                 <a:ea typeface="Calibri" pitchFamily="34" charset="-122"/>
                 <a:cs typeface="Calibri" pitchFamily="34" charset="-120"/>
               </a:rPr>
-              <a:t>Recall cao (84.3%) — bắt được phần lớn tấn công thật.  Precision thấp (11.3%) — hệ quả của dữ liệu mất cân bằng (~3% dương) ở ngưỡng mặc định 0.5. Đổi ngưỡng theo F1 (0.844): Precision → 28.9%, F1 → 0.324.</a:t>
+              <a:t>Recall cao (84.9%) — bắt được phần lớn tấn công thật.  Precision thấp (9.9%) — hệ quả của dữ liệu mất cân bằng (~3% dương) ở ngưỡng mặc định 0.5. Đổi ngưỡng theo F1 (0.844): Precision → 28.9%, F1 → 0.324.</a:t>
             </a:r>
             <a:endParaRPr lang="en-US" sz="1400" dirty="0"/>
           </a:p>
@@ -7050,6 +7121,837 @@
 </file>
 
 <file path=ppt/slides/slide15.xml><?xml version="1.0" encoding="utf-8"?>
+<p:sld xmlns:a="http://schemas.openxmlformats.org/drawingml/2006/main" xmlns:p="http://schemas.openxmlformats.org/presentationml/2006/main" xmlns:r="http://schemas.openxmlformats.org/officeDocument/2006/relationships">
+  <p:cSld>
+    <p:spTree>
+      <p:nvGrpSpPr>
+        <p:cNvPr id="1" name=""/>
+        <p:cNvGrpSpPr/>
+        <p:nvPr/>
+      </p:nvGrpSpPr>
+      <p:grpSpPr/>
+      <p:sp>
+        <p:nvSpPr>
+          <p:cNvPr id="2" name="Text 0"/>
+          <p:cNvSpPr/>
+          <p:nvPr/>
+        </p:nvSpPr>
+        <p:spPr>
+          <a:xfrm>
+            <a:off x="548640" y="384048"/>
+            <a:ext cx="7315200" cy="320040"/>
+          </a:xfrm>
+          <a:prstGeom prst="rect">
+            <a:avLst/>
+          </a:prstGeom>
+          <a:noFill/>
+          <a:ln/>
+        </p:spPr>
+        <p:txBody>
+          <a:bodyPr wrap="square" rtlCol="0" anchor="ctr"/>
+          <a:lstStyle/>
+          <a:p>
+            <a:pPr indent="0" marL="0">
+              <a:buNone/>
+            </a:pPr>
+            <a:r>
+              <a:rPr lang="en-US" sz="1600" b="1" spc="200" kern="0" dirty="0">
+                <a:solidFill>
+                  <a:srgbClr val="CADCFC"/>
+                </a:solidFill>
+                <a:latin typeface="Calibri" pitchFamily="34" charset="0"/>
+                <a:ea typeface="Calibri" pitchFamily="34" charset="-122"/>
+                <a:cs typeface="Calibri" pitchFamily="34" charset="-120"/>
+              </a:rPr>
+              <a:t>PHẦN 5 · ABLATION STUDY</a:t>
+            </a:r>
+            <a:endParaRPr lang="en-US" sz="1300" dirty="0"/>
+          </a:p>
+        </p:txBody>
+      </p:sp>
+      <p:sp>
+        <p:nvSpPr>
+          <p:cNvPr id="3" name="Text 1"/>
+          <p:cNvSpPr/>
+          <p:nvPr/>
+        </p:nvSpPr>
+        <p:spPr>
+          <a:xfrm>
+            <a:off x="548640" y="685800"/>
+            <a:ext cx="11064240" cy="822960"/>
+          </a:xfrm>
+          <a:prstGeom prst="rect">
+            <a:avLst/>
+          </a:prstGeom>
+          <a:noFill/>
+          <a:ln/>
+        </p:spPr>
+        <p:txBody>
+          <a:bodyPr wrap="square" rtlCol="0" anchor="ctr"/>
+          <a:lstStyle/>
+          <a:p>
+            <a:pPr indent="0" marL="0">
+              <a:buNone/>
+            </a:pPr>
+            <a:r>
+              <a:rPr lang="en-US" sz="3200" b="1" dirty="0">
+                <a:solidFill>
+                  <a:srgbClr val="FFFFFF"/>
+                </a:solidFill>
+                <a:latin typeface="Cambria" pitchFamily="34" charset="0"/>
+                <a:ea typeface="Cambria" pitchFamily="34" charset="-122"/>
+                <a:cs typeface="Cambria" pitchFamily="34" charset="-120"/>
+              </a:rPr>
+              <a:t>Ablation: đóng góp của đặc trưng mờ (Δ = MLP + Mamdani − MLP không fuzzy)</a:t>
+            </a:r>
+            <a:endParaRPr lang="en-US" sz="3200" dirty="0"/>
+          </a:p>
+        </p:txBody>
+      </p:sp>
+      <p:sp>
+        <p:nvSpPr>
+          <p:cNvPr id="4" name="Shape 2"/>
+          <p:cNvSpPr/>
+          <p:nvPr/>
+        </p:nvSpPr>
+        <p:spPr>
+          <a:xfrm>
+            <a:off x="548640" y="1920240"/>
+            <a:ext cx="1755648" cy="1920240"/>
+          </a:xfrm>
+          <a:prstGeom prst="roundRect">
+            <a:avLst>
+              <a:gd name="adj" fmla="val 5208"/>
+            </a:avLst>
+          </a:prstGeom>
+          <a:solidFill>
+            <a:srgbClr val="132747"/>
+          </a:solidFill>
+          <a:ln w="12700">
+            <a:solidFill>
+              <a:srgbClr val="1C7293"/>
+            </a:solidFill>
+            <a:prstDash val="solid"/>
+          </a:ln>
+        </p:spPr>
+        <p:txBody>
+          <a:bodyPr/>
+          <a:p/>
+        </p:txBody>
+      </p:sp>
+      <p:sp>
+        <p:nvSpPr>
+          <p:cNvPr id="5" name="Text 3"/>
+          <p:cNvSpPr/>
+          <p:nvPr/>
+        </p:nvSpPr>
+        <p:spPr>
+          <a:xfrm>
+            <a:off x="548640" y="2148840"/>
+            <a:ext cx="1755648" cy="914400"/>
+          </a:xfrm>
+          <a:prstGeom prst="rect">
+            <a:avLst/>
+          </a:prstGeom>
+          <a:noFill/>
+          <a:ln/>
+        </p:spPr>
+        <p:txBody>
+          <a:bodyPr wrap="square" rtlCol="0" anchor="ctr"/>
+          <a:lstStyle/>
+          <a:p>
+            <a:pPr algn="ctr" indent="0" marL="0">
+              <a:buNone/>
+            </a:pPr>
+            <a:r>
+              <a:rPr lang="en-US" sz="2700" b="1" dirty="0">
+                <a:solidFill>
+                  <a:srgbClr val="CADCFC"/>
+                </a:solidFill>
+                <a:latin typeface="Cambria" pitchFamily="34" charset="0"/>
+                <a:ea typeface="Cambria" pitchFamily="34" charset="-122"/>
+                <a:cs typeface="Cambria" pitchFamily="34" charset="-120"/>
+              </a:rPr>
+              <a:t>+2.1%</a:t>
+            </a:r>
+            <a:endParaRPr lang="en-US" sz="2700" dirty="0"/>
+          </a:p>
+        </p:txBody>
+      </p:sp>
+      <p:sp>
+        <p:nvSpPr>
+          <p:cNvPr id="6" name="Text 4"/>
+          <p:cNvSpPr/>
+          <p:nvPr/>
+        </p:nvSpPr>
+        <p:spPr>
+          <a:xfrm>
+            <a:off x="548640" y="3154680"/>
+            <a:ext cx="1755648" cy="457200"/>
+          </a:xfrm>
+          <a:prstGeom prst="rect">
+            <a:avLst/>
+          </a:prstGeom>
+          <a:noFill/>
+          <a:ln/>
+        </p:spPr>
+        <p:txBody>
+          <a:bodyPr wrap="square" rtlCol="0" anchor="ctr"/>
+          <a:lstStyle/>
+          <a:p>
+            <a:pPr algn="ctr" indent="0" marL="0">
+              <a:buNone/>
+            </a:pPr>
+            <a:r>
+              <a:rPr lang="en-US" sz="1600" b="1" dirty="0">
+                <a:solidFill>
+                  <a:srgbClr val="FFFFFF"/>
+                </a:solidFill>
+                <a:latin typeface="Calibri" pitchFamily="34" charset="0"/>
+                <a:ea typeface="Calibri" pitchFamily="34" charset="-122"/>
+                <a:cs typeface="Calibri" pitchFamily="34" charset="-120"/>
+              </a:rPr>
+              <a:t>AUROC</a:t>
+            </a:r>
+            <a:endParaRPr lang="en-US" sz="1300" dirty="0"/>
+          </a:p>
+        </p:txBody>
+      </p:sp>
+      <p:sp>
+        <p:nvSpPr>
+          <p:cNvPr id="7" name="Shape 5"/>
+          <p:cNvSpPr/>
+          <p:nvPr/>
+        </p:nvSpPr>
+        <p:spPr>
+          <a:xfrm>
+            <a:off x="2450592" y="1920240"/>
+            <a:ext cx="1755648" cy="1920240"/>
+          </a:xfrm>
+          <a:prstGeom prst="roundRect">
+            <a:avLst>
+              <a:gd name="adj" fmla="val 5208"/>
+            </a:avLst>
+          </a:prstGeom>
+          <a:solidFill>
+            <a:srgbClr val="132747"/>
+          </a:solidFill>
+          <a:ln w="12700">
+            <a:solidFill>
+              <a:srgbClr val="1C7293"/>
+            </a:solidFill>
+            <a:prstDash val="solid"/>
+          </a:ln>
+        </p:spPr>
+        <p:txBody>
+          <a:bodyPr/>
+          <a:p/>
+        </p:txBody>
+      </p:sp>
+      <p:sp>
+        <p:nvSpPr>
+          <p:cNvPr id="8" name="Text 6"/>
+          <p:cNvSpPr/>
+          <p:nvPr/>
+        </p:nvSpPr>
+        <p:spPr>
+          <a:xfrm>
+            <a:off x="2450592" y="2148840"/>
+            <a:ext cx="1755648" cy="914400"/>
+          </a:xfrm>
+          <a:prstGeom prst="rect">
+            <a:avLst/>
+          </a:prstGeom>
+          <a:noFill/>
+          <a:ln/>
+        </p:spPr>
+        <p:txBody>
+          <a:bodyPr wrap="square" rtlCol="0" anchor="ctr"/>
+          <a:lstStyle/>
+          <a:p>
+            <a:pPr algn="ctr" indent="0" marL="0">
+              <a:buNone/>
+            </a:pPr>
+            <a:r>
+              <a:rPr lang="en-US" sz="2700" b="1" dirty="0">
+                <a:solidFill>
+                  <a:srgbClr val="CADCFC"/>
+                </a:solidFill>
+                <a:latin typeface="Cambria" pitchFamily="34" charset="0"/>
+                <a:ea typeface="Cambria" pitchFamily="34" charset="-122"/>
+                <a:cs typeface="Cambria" pitchFamily="34" charset="-120"/>
+              </a:rPr>
+              <a:t>+7.5%</a:t>
+            </a:r>
+            <a:endParaRPr lang="en-US" sz="2700" dirty="0"/>
+          </a:p>
+        </p:txBody>
+      </p:sp>
+      <p:sp>
+        <p:nvSpPr>
+          <p:cNvPr id="9" name="Text 7"/>
+          <p:cNvSpPr/>
+          <p:nvPr/>
+        </p:nvSpPr>
+        <p:spPr>
+          <a:xfrm>
+            <a:off x="2450592" y="3154680"/>
+            <a:ext cx="1755648" cy="457200"/>
+          </a:xfrm>
+          <a:prstGeom prst="rect">
+            <a:avLst/>
+          </a:prstGeom>
+          <a:noFill/>
+          <a:ln/>
+        </p:spPr>
+        <p:txBody>
+          <a:bodyPr wrap="square" rtlCol="0" anchor="ctr"/>
+          <a:lstStyle/>
+          <a:p>
+            <a:pPr algn="ctr" indent="0" marL="0">
+              <a:buNone/>
+            </a:pPr>
+            <a:r>
+              <a:rPr lang="en-US" sz="1600" b="1" dirty="0">
+                <a:solidFill>
+                  <a:srgbClr val="FFFFFF"/>
+                </a:solidFill>
+                <a:latin typeface="Calibri" pitchFamily="34" charset="0"/>
+                <a:ea typeface="Calibri" pitchFamily="34" charset="-122"/>
+                <a:cs typeface="Calibri" pitchFamily="34" charset="-120"/>
+              </a:rPr>
+              <a:t>AUPRC</a:t>
+            </a:r>
+            <a:endParaRPr lang="en-US" sz="1300" dirty="0"/>
+          </a:p>
+        </p:txBody>
+      </p:sp>
+      <p:sp>
+        <p:nvSpPr>
+          <p:cNvPr id="10" name="Shape 8"/>
+          <p:cNvSpPr/>
+          <p:nvPr/>
+        </p:nvSpPr>
+        <p:spPr>
+          <a:xfrm>
+            <a:off x="4352544" y="1920240"/>
+            <a:ext cx="1755648" cy="1920240"/>
+          </a:xfrm>
+          <a:prstGeom prst="roundRect">
+            <a:avLst>
+              <a:gd name="adj" fmla="val 5208"/>
+            </a:avLst>
+          </a:prstGeom>
+          <a:solidFill>
+            <a:srgbClr val="132747"/>
+          </a:solidFill>
+          <a:ln w="12700">
+            <a:solidFill>
+              <a:srgbClr val="1C7293"/>
+            </a:solidFill>
+            <a:prstDash val="solid"/>
+          </a:ln>
+        </p:spPr>
+        <p:txBody>
+          <a:bodyPr/>
+          <a:p/>
+        </p:txBody>
+      </p:sp>
+      <p:sp>
+        <p:nvSpPr>
+          <p:cNvPr id="11" name="Text 9"/>
+          <p:cNvSpPr/>
+          <p:nvPr/>
+        </p:nvSpPr>
+        <p:spPr>
+          <a:xfrm>
+            <a:off x="4352544" y="2148840"/>
+            <a:ext cx="1755648" cy="914400"/>
+          </a:xfrm>
+          <a:prstGeom prst="rect">
+            <a:avLst/>
+          </a:prstGeom>
+          <a:noFill/>
+          <a:ln/>
+        </p:spPr>
+        <p:txBody>
+          <a:bodyPr wrap="square" rtlCol="0" anchor="ctr"/>
+          <a:lstStyle/>
+          <a:p>
+            <a:pPr algn="ctr" indent="0" marL="0">
+              <a:buNone/>
+            </a:pPr>
+            <a:r>
+              <a:rPr lang="en-US" sz="2700" b="1" dirty="0">
+                <a:solidFill>
+                  <a:srgbClr val="CADCFC"/>
+                </a:solidFill>
+                <a:latin typeface="Cambria" pitchFamily="34" charset="0"/>
+                <a:ea typeface="Cambria" pitchFamily="34" charset="-122"/>
+                <a:cs typeface="Cambria" pitchFamily="34" charset="-120"/>
+              </a:rPr>
+              <a:t>−0.7%</a:t>
+            </a:r>
+            <a:endParaRPr lang="en-US" sz="2700" dirty="0"/>
+          </a:p>
+        </p:txBody>
+      </p:sp>
+      <p:sp>
+        <p:nvSpPr>
+          <p:cNvPr id="12" name="Text 10"/>
+          <p:cNvSpPr/>
+          <p:nvPr/>
+        </p:nvSpPr>
+        <p:spPr>
+          <a:xfrm>
+            <a:off x="4352544" y="3154680"/>
+            <a:ext cx="1755648" cy="457200"/>
+          </a:xfrm>
+          <a:prstGeom prst="rect">
+            <a:avLst/>
+          </a:prstGeom>
+          <a:noFill/>
+          <a:ln/>
+        </p:spPr>
+        <p:txBody>
+          <a:bodyPr wrap="square" rtlCol="0" anchor="ctr"/>
+          <a:lstStyle/>
+          <a:p>
+            <a:pPr algn="ctr" indent="0" marL="0">
+              <a:buNone/>
+            </a:pPr>
+            <a:r>
+              <a:rPr lang="en-US" sz="1600" b="1" dirty="0">
+                <a:solidFill>
+                  <a:srgbClr val="FFFFFF"/>
+                </a:solidFill>
+                <a:latin typeface="Calibri" pitchFamily="34" charset="0"/>
+                <a:ea typeface="Calibri" pitchFamily="34" charset="-122"/>
+                <a:cs typeface="Calibri" pitchFamily="34" charset="-120"/>
+              </a:rPr>
+              <a:t>Accuracy</a:t>
+            </a:r>
+            <a:endParaRPr lang="en-US" sz="1300" dirty="0"/>
+          </a:p>
+        </p:txBody>
+      </p:sp>
+      <p:sp>
+        <p:nvSpPr>
+          <p:cNvPr id="13" name="Shape 11"/>
+          <p:cNvSpPr/>
+          <p:nvPr/>
+        </p:nvSpPr>
+        <p:spPr>
+          <a:xfrm>
+            <a:off x="6254496" y="1920240"/>
+            <a:ext cx="1755648" cy="1920240"/>
+          </a:xfrm>
+          <a:prstGeom prst="roundRect">
+            <a:avLst>
+              <a:gd name="adj" fmla="val 5208"/>
+            </a:avLst>
+          </a:prstGeom>
+          <a:solidFill>
+            <a:srgbClr val="132747"/>
+          </a:solidFill>
+          <a:ln w="12700">
+            <a:solidFill>
+              <a:srgbClr val="1C7293"/>
+            </a:solidFill>
+            <a:prstDash val="solid"/>
+          </a:ln>
+        </p:spPr>
+        <p:txBody>
+          <a:bodyPr/>
+          <a:p/>
+        </p:txBody>
+      </p:sp>
+      <p:sp>
+        <p:nvSpPr>
+          <p:cNvPr id="14" name="Text 12"/>
+          <p:cNvSpPr/>
+          <p:nvPr/>
+        </p:nvSpPr>
+        <p:spPr>
+          <a:xfrm>
+            <a:off x="6254496" y="2148840"/>
+            <a:ext cx="1755648" cy="914400"/>
+          </a:xfrm>
+          <a:prstGeom prst="rect">
+            <a:avLst/>
+          </a:prstGeom>
+          <a:noFill/>
+          <a:ln/>
+        </p:spPr>
+        <p:txBody>
+          <a:bodyPr wrap="square" rtlCol="0" anchor="ctr"/>
+          <a:lstStyle/>
+          <a:p>
+            <a:pPr algn="ctr" indent="0" marL="0">
+              <a:buNone/>
+            </a:pPr>
+            <a:r>
+              <a:rPr lang="en-US" sz="2700" b="1" dirty="0">
+                <a:solidFill>
+                  <a:srgbClr val="CADCFC"/>
+                </a:solidFill>
+                <a:latin typeface="Cambria" pitchFamily="34" charset="0"/>
+                <a:ea typeface="Cambria" pitchFamily="34" charset="-122"/>
+                <a:cs typeface="Cambria" pitchFamily="34" charset="-120"/>
+              </a:rPr>
+              <a:t>≈0</a:t>
+            </a:r>
+            <a:endParaRPr lang="en-US" sz="2700" dirty="0"/>
+          </a:p>
+        </p:txBody>
+      </p:sp>
+      <p:sp>
+        <p:nvSpPr>
+          <p:cNvPr id="15" name="Text 13"/>
+          <p:cNvSpPr/>
+          <p:nvPr/>
+        </p:nvSpPr>
+        <p:spPr>
+          <a:xfrm>
+            <a:off x="6254496" y="3154680"/>
+            <a:ext cx="1755648" cy="457200"/>
+          </a:xfrm>
+          <a:prstGeom prst="rect">
+            <a:avLst/>
+          </a:prstGeom>
+          <a:noFill/>
+          <a:ln/>
+        </p:spPr>
+        <p:txBody>
+          <a:bodyPr wrap="square" rtlCol="0" anchor="ctr"/>
+          <a:lstStyle/>
+          <a:p>
+            <a:pPr algn="ctr" indent="0" marL="0">
+              <a:buNone/>
+            </a:pPr>
+            <a:r>
+              <a:rPr lang="en-US" sz="1600" b="1" dirty="0">
+                <a:solidFill>
+                  <a:srgbClr val="FFFFFF"/>
+                </a:solidFill>
+                <a:latin typeface="Calibri" pitchFamily="34" charset="0"/>
+                <a:ea typeface="Calibri" pitchFamily="34" charset="-122"/>
+                <a:cs typeface="Calibri" pitchFamily="34" charset="-120"/>
+              </a:rPr>
+              <a:t>Precision</a:t>
+            </a:r>
+            <a:endParaRPr lang="en-US" sz="1300" dirty="0"/>
+          </a:p>
+        </p:txBody>
+      </p:sp>
+      <p:sp>
+        <p:nvSpPr>
+          <p:cNvPr id="16" name="Shape 14"/>
+          <p:cNvSpPr/>
+          <p:nvPr/>
+        </p:nvSpPr>
+        <p:spPr>
+          <a:xfrm>
+            <a:off x="8156448" y="1920240"/>
+            <a:ext cx="1755648" cy="1920240"/>
+          </a:xfrm>
+          <a:prstGeom prst="roundRect">
+            <a:avLst>
+              <a:gd name="adj" fmla="val 5208"/>
+            </a:avLst>
+          </a:prstGeom>
+          <a:solidFill>
+            <a:srgbClr val="132747"/>
+          </a:solidFill>
+          <a:ln w="12700">
+            <a:solidFill>
+              <a:srgbClr val="1C7293"/>
+            </a:solidFill>
+            <a:prstDash val="solid"/>
+          </a:ln>
+        </p:spPr>
+        <p:txBody>
+          <a:bodyPr/>
+          <a:p/>
+        </p:txBody>
+      </p:sp>
+      <p:sp>
+        <p:nvSpPr>
+          <p:cNvPr id="17" name="Text 15"/>
+          <p:cNvSpPr/>
+          <p:nvPr/>
+        </p:nvSpPr>
+        <p:spPr>
+          <a:xfrm>
+            <a:off x="8156448" y="2148840"/>
+            <a:ext cx="1755648" cy="914400"/>
+          </a:xfrm>
+          <a:prstGeom prst="rect">
+            <a:avLst/>
+          </a:prstGeom>
+          <a:noFill/>
+          <a:ln/>
+        </p:spPr>
+        <p:txBody>
+          <a:bodyPr wrap="square" rtlCol="0" anchor="ctr"/>
+          <a:lstStyle/>
+          <a:p>
+            <a:pPr algn="ctr" indent="0" marL="0">
+              <a:buNone/>
+            </a:pPr>
+            <a:r>
+              <a:rPr lang="en-US" sz="2700" b="1" dirty="0">
+                <a:solidFill>
+                  <a:srgbClr val="CADCFC"/>
+                </a:solidFill>
+                <a:latin typeface="Cambria" pitchFamily="34" charset="0"/>
+                <a:ea typeface="Cambria" pitchFamily="34" charset="-122"/>
+                <a:cs typeface="Cambria" pitchFamily="34" charset="-120"/>
+              </a:rPr>
+              <a:t>+2.7%</a:t>
+            </a:r>
+            <a:endParaRPr lang="en-US" sz="2700" dirty="0"/>
+          </a:p>
+        </p:txBody>
+      </p:sp>
+      <p:sp>
+        <p:nvSpPr>
+          <p:cNvPr id="18" name="Text 16"/>
+          <p:cNvSpPr/>
+          <p:nvPr/>
+        </p:nvSpPr>
+        <p:spPr>
+          <a:xfrm>
+            <a:off x="8156448" y="3154680"/>
+            <a:ext cx="1755648" cy="457200"/>
+          </a:xfrm>
+          <a:prstGeom prst="rect">
+            <a:avLst/>
+          </a:prstGeom>
+          <a:noFill/>
+          <a:ln/>
+        </p:spPr>
+        <p:txBody>
+          <a:bodyPr wrap="square" rtlCol="0" anchor="ctr"/>
+          <a:lstStyle/>
+          <a:p>
+            <a:pPr algn="ctr" indent="0" marL="0">
+              <a:buNone/>
+            </a:pPr>
+            <a:r>
+              <a:rPr lang="en-US" sz="1600" b="1" dirty="0">
+                <a:solidFill>
+                  <a:srgbClr val="FFFFFF"/>
+                </a:solidFill>
+                <a:latin typeface="Calibri" pitchFamily="34" charset="0"/>
+                <a:ea typeface="Calibri" pitchFamily="34" charset="-122"/>
+                <a:cs typeface="Calibri" pitchFamily="34" charset="-120"/>
+              </a:rPr>
+              <a:t>Recall</a:t>
+            </a:r>
+            <a:endParaRPr lang="en-US" sz="1300" dirty="0"/>
+          </a:p>
+        </p:txBody>
+      </p:sp>
+      <p:sp>
+        <p:nvSpPr>
+          <p:cNvPr id="19" name="Shape 17"/>
+          <p:cNvSpPr/>
+          <p:nvPr/>
+        </p:nvSpPr>
+        <p:spPr>
+          <a:xfrm>
+            <a:off x="10058400" y="1920240"/>
+            <a:ext cx="1755648" cy="1920240"/>
+          </a:xfrm>
+          <a:prstGeom prst="roundRect">
+            <a:avLst>
+              <a:gd name="adj" fmla="val 5208"/>
+            </a:avLst>
+          </a:prstGeom>
+          <a:solidFill>
+            <a:srgbClr val="132747"/>
+          </a:solidFill>
+          <a:ln w="12700">
+            <a:solidFill>
+              <a:srgbClr val="1C7293"/>
+            </a:solidFill>
+            <a:prstDash val="solid"/>
+          </a:ln>
+        </p:spPr>
+        <p:txBody>
+          <a:bodyPr/>
+          <a:p/>
+        </p:txBody>
+      </p:sp>
+      <p:sp>
+        <p:nvSpPr>
+          <p:cNvPr id="20" name="Text 18"/>
+          <p:cNvSpPr/>
+          <p:nvPr/>
+        </p:nvSpPr>
+        <p:spPr>
+          <a:xfrm>
+            <a:off x="10058400" y="2148840"/>
+            <a:ext cx="1755648" cy="914400"/>
+          </a:xfrm>
+          <a:prstGeom prst="rect">
+            <a:avLst/>
+          </a:prstGeom>
+          <a:noFill/>
+          <a:ln/>
+        </p:spPr>
+        <p:txBody>
+          <a:bodyPr wrap="square" rtlCol="0" anchor="ctr"/>
+          <a:lstStyle/>
+          <a:p>
+            <a:pPr algn="ctr" indent="0" marL="0">
+              <a:buNone/>
+            </a:pPr>
+            <a:r>
+              <a:rPr lang="en-US" sz="2700" b="1" dirty="0">
+                <a:solidFill>
+                  <a:srgbClr val="CADCFC"/>
+                </a:solidFill>
+                <a:latin typeface="Cambria" pitchFamily="34" charset="0"/>
+                <a:ea typeface="Cambria" pitchFamily="34" charset="-122"/>
+                <a:cs typeface="Cambria" pitchFamily="34" charset="-120"/>
+              </a:rPr>
+              <a:t>≈0</a:t>
+            </a:r>
+            <a:endParaRPr lang="en-US" sz="2700" dirty="0"/>
+          </a:p>
+        </p:txBody>
+      </p:sp>
+      <p:sp>
+        <p:nvSpPr>
+          <p:cNvPr id="21" name="Text 19"/>
+          <p:cNvSpPr/>
+          <p:nvPr/>
+        </p:nvSpPr>
+        <p:spPr>
+          <a:xfrm>
+            <a:off x="10058400" y="3154680"/>
+            <a:ext cx="1755648" cy="457200"/>
+          </a:xfrm>
+          <a:prstGeom prst="rect">
+            <a:avLst/>
+          </a:prstGeom>
+          <a:noFill/>
+          <a:ln/>
+        </p:spPr>
+        <p:txBody>
+          <a:bodyPr wrap="square" rtlCol="0" anchor="ctr"/>
+          <a:lstStyle/>
+          <a:p>
+            <a:pPr algn="ctr" indent="0" marL="0">
+              <a:buNone/>
+            </a:pPr>
+            <a:r>
+              <a:rPr lang="en-US" sz="1600" b="1" dirty="0">
+                <a:solidFill>
+                  <a:srgbClr val="FFFFFF"/>
+                </a:solidFill>
+                <a:latin typeface="Calibri" pitchFamily="34" charset="0"/>
+                <a:ea typeface="Calibri" pitchFamily="34" charset="-122"/>
+                <a:cs typeface="Calibri" pitchFamily="34" charset="-120"/>
+              </a:rPr>
+              <a:t>F1</a:t>
+            </a:r>
+            <a:endParaRPr lang="en-US" sz="1300" dirty="0"/>
+          </a:p>
+        </p:txBody>
+      </p:sp>
+      <p:sp>
+        <p:nvSpPr>
+          <p:cNvPr id="22" name="Text 20"/>
+          <p:cNvSpPr/>
+          <p:nvPr/>
+        </p:nvSpPr>
+        <p:spPr>
+          <a:xfrm>
+            <a:off x="548640" y="4251960"/>
+            <a:ext cx="11064240" cy="914400"/>
+          </a:xfrm>
+          <a:prstGeom prst="rect">
+            <a:avLst/>
+          </a:prstGeom>
+          <a:noFill/>
+          <a:ln/>
+        </p:spPr>
+        <p:txBody>
+          <a:bodyPr wrap="square" rtlCol="0" anchor="ctr"/>
+          <a:lstStyle/>
+          <a:p>
+            <a:pPr indent="0" marL="0">
+              <a:lnSpc>
+                <a:spcPts val="2000"/>
+              </a:lnSpc>
+              <a:buNone/>
+            </a:pPr>
+            <a:r>
+              <a:rPr lang="en-US" sz="1600" i="1" dirty="0">
+                <a:solidFill>
+                  <a:srgbClr val="D6DEEB"/>
+                </a:solidFill>
+                <a:latin typeface="Calibri" pitchFamily="34" charset="0"/>
+                <a:ea typeface="Calibri" pitchFamily="34" charset="-122"/>
+                <a:cs typeface="Calibri" pitchFamily="34" charset="-120"/>
+              </a:rPr>
+              <a:t>Δ = (MLP + Mamdani FIS) − (MLP không có đặc trưng mờ), cùng mẫu 246.600 dòng và cùng seed. Đặc trưng mờ cải thiện rõ nhất ở AUPRC (+7.5%) và Recall (+2.7%) — hai chỉ số quan trọng nhất với dữ liệu lệch lớp ~3%; Accuracy/Precision gần như không đổi. Kết luận: nhánh Mamdani đóng góp thực sự vào chất lượng xếp hạng rủi ro.</a:t>
+            </a:r>
+            <a:endParaRPr lang="en-US" sz="1400" dirty="0"/>
+          </a:p>
+        </p:txBody>
+      </p:sp>
+      <p:sp>
+        <p:nvSpPr>
+          <p:cNvPr id="23" name="Text 21"/>
+          <p:cNvSpPr/>
+          <p:nvPr/>
+        </p:nvSpPr>
+        <p:spPr>
+          <a:xfrm>
+            <a:off x="11548872" y="6446520"/>
+            <a:ext cx="457200" cy="274320"/>
+          </a:xfrm>
+          <a:prstGeom prst="rect">
+            <a:avLst/>
+          </a:prstGeom>
+          <a:noFill/>
+          <a:ln/>
+        </p:spPr>
+        <p:txBody>
+          <a:bodyPr wrap="square" rtlCol="0" anchor="ctr"/>
+          <a:lstStyle/>
+          <a:p>
+            <a:pPr algn="r" indent="0" marL="0">
+              <a:buNone/>
+            </a:pPr>
+            <a:r>
+              <a:rPr lang="en-US" sz="1600" dirty="0">
+                <a:solidFill>
+                  <a:srgbClr val="8FA3C7"/>
+                </a:solidFill>
+                <a:latin typeface="Calibri" pitchFamily="34" charset="0"/>
+                <a:ea typeface="Calibri" pitchFamily="34" charset="-122"/>
+                <a:cs typeface="Calibri" pitchFamily="34" charset="-120"/>
+              </a:rPr>
+              <a:t>15</a:t>
+            </a:r>
+            <a:endParaRPr lang="en-US" sz="1000" dirty="0"/>
+          </a:p>
+        </p:txBody>
+      </p:sp>
+    </p:spTree>
+  </p:cSld>
+  <p:clrMapOvr>
+    <a:masterClrMapping/>
+  </p:clrMapOvr>
+</p:sld>
+</file>
+
+<file path=ppt/slides/slide16.xml><?xml version="1.0" encoding="utf-8"?>
 <p:sld xmlns:a="http://schemas.openxmlformats.org/drawingml/2006/main" xmlns:r="http://schemas.openxmlformats.org/officeDocument/2006/relationships" xmlns:p="http://schemas.openxmlformats.org/presentationml/2006/main">
   <p:cSld name="Slide 15">
     <p:spTree>
@@ -7305,7 +8207,7 @@
                 <a:ea typeface="Calibri" pitchFamily="34" charset="-122"/>
                 <a:cs typeface="Calibri" pitchFamily="34" charset="-120"/>
               </a:rPr>
-              <a:t>Train loss giảm ổn định, Val AUPRC/AUROC hội tụ trước epoch 30 (early stopping kích hoạt) → mô hình không overfitting. AUC-ROC = 0.878 cho thấy khả năng phân biệt tốt; đường Precision-Recall thấp hơn nhiều so với ROC — đúng đặc trưng của bài toán có tỷ lệ dương chỉ ~3%, nơi AUPRC phản ánh độ khó thực tế rõ hơn AUROC.</a:t>
+              <a:t>Train loss giảm ổn định, Val AUPRC/AUROC hội tụ trước epoch 30 (early stopping kích hoạt) → mô hình không overfitting. AUC-ROC = 0.866 cho thấy khả năng phân biệt tốt; đường Precision-Recall thấp hơn nhiều so với ROC — đúng đặc trưng của bài toán có tỷ lệ dương chỉ ~3%, nơi AUPRC phản ánh độ khó thực tế rõ hơn AUROC.</a:t>
             </a:r>
             <a:endParaRPr lang="en-US" sz="1400" dirty="0"/>
           </a:p>
@@ -7344,7 +8246,7 @@
                 <a:ea typeface="Calibri" pitchFamily="34" charset="-122"/>
                 <a:cs typeface="Calibri" pitchFamily="34" charset="-120"/>
               </a:rPr>
-              <a:t>15</a:t>
+              <a:t>16</a:t>
             </a:r>
             <a:endParaRPr lang="en-US" sz="1000" dirty="0"/>
           </a:p>
@@ -7358,7 +8260,7 @@
 </p:sld>
 </file>
 
-<file path=ppt/slides/slide16.xml><?xml version="1.0" encoding="utf-8"?>
+<file path=ppt/slides/slide17.xml><?xml version="1.0" encoding="utf-8"?>
 <p:sld xmlns:a="http://schemas.openxmlformats.org/drawingml/2006/main" xmlns:r="http://schemas.openxmlformats.org/officeDocument/2006/relationships" xmlns:p="http://schemas.openxmlformats.org/presentationml/2006/main">
   <p:cSld name="Slide 16">
     <p:spTree>
@@ -7808,7 +8710,7 @@
                 <a:ea typeface="Calibri" pitchFamily="34" charset="-122"/>
                 <a:cs typeface="Calibri" pitchFamily="34" charset="-120"/>
               </a:rPr>
-              <a:t>16</a:t>
+              <a:t>17</a:t>
             </a:r>
             <a:endParaRPr lang="en-US" sz="1000" dirty="0"/>
           </a:p>
@@ -7822,7 +8724,7 @@
 </p:sld>
 </file>
 
-<file path=ppt/slides/slide17.xml><?xml version="1.0" encoding="utf-8"?>
+<file path=ppt/slides/slide18.xml><?xml version="1.0" encoding="utf-8"?>
 <p:sld xmlns:a="http://schemas.openxmlformats.org/drawingml/2006/main" xmlns:r="http://schemas.openxmlformats.org/officeDocument/2006/relationships" xmlns:p="http://schemas.openxmlformats.org/presentationml/2006/main">
   <p:cSld name="Slide 17">
     <p:spTree>
@@ -8000,7 +8902,7 @@
                 <a:ea typeface="Calibri" pitchFamily="34" charset="-122"/>
                 <a:cs typeface="Calibri" pitchFamily="34" charset="-120"/>
               </a:rPr>
-              <a:t>Mamdani Fuzzy Inference System mã hoá tri thức chuyên gia (8 luật IF-THEN) thành đặc trưng bổ sung; MLP học phần còn lại từ dữ liệu thô. Trên 500.000 lượt đăng nhập thật, mô hình đạt AUROC 0.878 và Recall 84.3% — phát hiện được phần lớn tấn công, với đánh đổi báo động giả có thể điều chỉnh qua ngưỡng quyết định.</a:t>
+              <a:t>Mamdani Fuzzy Inference System mã hoá tri thức chuyên gia (8 luật IF-THEN) thành đặc trưng bổ sung; MLP học phần còn lại từ dữ liệu thô. Trên 500.000 lượt đăng nhập thật, mô hình đạt AUROC 0.866 và Recall 84.9% — phát hiện được phần lớn tấn công, với đánh đổi báo động giả có thể điều chỉnh qua ngưỡng quyết định.</a:t>
             </a:r>
             <a:endParaRPr lang="en-US" sz="1600" dirty="0"/>
           </a:p>
@@ -8039,7 +8941,7 @@
                 <a:ea typeface="Calibri" pitchFamily="34" charset="-122"/>
                 <a:cs typeface="Calibri" pitchFamily="34" charset="-120"/>
               </a:rPr>
-              <a:t>17</a:t>
+              <a:t>18</a:t>
             </a:r>
             <a:endParaRPr lang="en-US" sz="1000" dirty="0"/>
           </a:p>
@@ -8053,7 +8955,7 @@
 </p:sld>
 </file>
 
-<file path=ppt/slides/slide18.xml><?xml version="1.0" encoding="utf-8"?>
+<file path=ppt/slides/slide19.xml><?xml version="1.0" encoding="utf-8"?>
 <p:sld xmlns:a="http://schemas.openxmlformats.org/drawingml/2006/main" xmlns:r="http://schemas.openxmlformats.org/officeDocument/2006/relationships" xmlns:p="http://schemas.openxmlformats.org/presentationml/2006/main">
   <p:cSld name="Slide 18">
     <p:spTree>
@@ -13764,7 +14666,7 @@
                 <a:ea typeface="Cambria" pitchFamily="34" charset="-122"/>
                 <a:cs typeface="Cambria" pitchFamily="34" charset="-120"/>
               </a:rPr>
-              <a:t>Hàm thành viên thực tế (fit trên 500.000 dòng Train)</a:t>
+              <a:t>Hàm thành viên thực tế (fit trên tập Train)</a:t>
             </a:r>
             <a:endParaRPr lang="en-US" sz="3200" dirty="0"/>
           </a:p>

--- a/Nhom_10-Nhan_Kien_Tuan.pptx
+++ b/Nhom_10-Nhan_Kien_Tuan.pptx
@@ -7067,7 +7067,7 @@
                 <a:ea typeface="Calibri" pitchFamily="34" charset="-122"/>
                 <a:cs typeface="Calibri" pitchFamily="34" charset="-120"/>
               </a:rPr>
-              <a:t>Recall cao (84.9%) — bắt được phần lớn tấn công thật.  Precision thấp (9.9%) — hệ quả của dữ liệu mất cân bằng (~3% dương) ở ngưỡng mặc định 0.5. Đổi ngưỡng theo F1 (0.844): Precision → 28.9%, F1 → 0.324.</a:t>
+              <a:t>Recall cao (84.9%) — bắt được phần lớn tấn công thật.  Precision thấp (9.9%) — hệ quả của dữ liệu mất cân bằng (~3% dương) ở ngưỡng mặc định 0.5. Đổi ngưỡng theo F1 (0.823): Precision → 28.8%, F1 → 0.310.</a:t>
             </a:r>
             <a:endParaRPr lang="en-US" sz="1400" dirty="0"/>
           </a:p>

--- a/Nhom_10-Nhan_Kien_Tuan.pptx
+++ b/Nhom_10-Nhan_Kien_Tuan.pptx
@@ -949,7 +949,7 @@
           <a:lstStyle/>
           <a:p>
             <a:r>
-              <a:t>Kết quả trên tập test 36.997 dòng: AUROC 86.6%, AUPRC 22.3%, Accuracy 75.4%, Precision 9.9%, Recall 84.9%, F1 17.7%. Recall cao = bắt được phần lớn tấn công; Precision thấp = nhiều báo động giả do mất cân bằng ở ngưỡng 0.5. Lưu ý: nhấn AUPRC (so với baseline ngẫu nhiên ~3%) mới phản ánh chất lượng thật; Accuracy dễ gây hiểu nhầm với dữ liệu lệch lớp.</a:t>
+              <a:t>Kết quả trên tập test 75.000 dòng (toàn bộ bộ dữ liệu 500.000 lượt đăng nhập): AUROC 87.7%, AUPRC 21.6%, Accuracy 79.5%, Precision 11.4%, Recall 84.3%, F1 20.1%. Recall cao = bắt được phần lớn tấn công; Precision thấp = nhiều báo động giả do mất cân bằng ở ngưỡng 0.5. Lưu ý: nhấn AUPRC (so với baseline ngẫu nhiên ~3%) mới phản ánh chất lượng thật; Accuracy dễ gây hiểu nhầm với dữ liệu lệch lớp.</a:t>
             </a:r>
           </a:p>
         </p:txBody>
@@ -1207,7 +1207,7 @@
           <a:lstStyle/>
           <a:p>
             <a:r>
-              <a:t>Kết luận: hệ lai MLP + Mamdani — tri thức chuyên gia (8 luật IF-THEN) và học sâu bổ trợ lẫn nhau. Trên 500.000 lượt đăng nhập thật, mô hình đạt AUROC 0.866 và Recall 84.9%, phát hiện được phần lớn tấn công; đánh đổi báo động giả có thể điều chỉnh qua ngưỡng quyết định. Lưu ý: nhấn đóng góp và tính GIẢI THÍCH ĐƯỢC của mô hình.</a:t>
+              <a:t>Kết luận: hệ lai MLP + Mamdani — tri thức chuyên gia (8 luật IF-THEN) và học sâu bổ trợ lẫn nhau. Trên 500.000 lượt đăng nhập thật, mô hình đạt AUROC 0.877 và Recall 84.3%, phát hiện được phần lớn tấn công; đánh đổi báo động giả có thể điều chỉnh qua ngưỡng quyết định. Lưu ý: nhấn đóng góp và tính GIẢI THÍCH ĐƯỢC của mô hình.</a:t>
             </a:r>
           </a:p>
         </p:txBody>
@@ -1379,7 +1379,7 @@
           <a:lstStyle/>
           <a:p>
             <a:r>
-              <a:t>Slide ablation — chứng minh nhánh mờ có đóng góp. Ta huấn luyện lại đúng kiến trúc, cách chia và seed nhưng BỎ 16 đặc trưng mờ, rồi so với mô hình đầy đủ trên cùng mẫu 246.600 dòng. Δ = (có mờ) − (không mờ): AUPRC +7.5%, Recall +2.7%, AUROC +2.1% (tăng rõ ở các chỉ số quan trọng với dữ liệu lệch lớp), Accuracy/Precision gần như không đổi. Lưu ý: nhấn rằng đặc trưng mờ là hàm phi tuyến tường minh của cùng biến thô — MLP có thể tự học một phần, nhưng mã hoá sẵn tri thức 8 luật giúp hội tụ tới tín hiệu rủi ro tốt hơn. Đây là bằng chứng định lượng cho câu hỏi 'phần mờ có thực sự cần thiết không?'.</a:t>
+              <a:t>Slide ablation — chứng minh nhánh mờ có đóng góp. Ta huấn luyện lại đúng kiến trúc, cách chia tập và seed nhưng BỎ 16 đặc trưng mờ, rồi so với mô hình đầy đủ trên cùng bộ dữ liệu. Δ = (có mờ) − (không mờ): Recall +1.4%, AUPRC +1.0%, AUROC +0.9%, Accuracy +0.6%, Precision +0.4%, F1 +0.7% — cải thiện nhất quán trên MỌI chỉ số. Lưu ý: nhấn rằng đặc trưng mờ là hàm phi tuyến tường minh của cùng biến thô — MLP có thể tự học một phần, nhưng mã hoá sẵn tri thức 8 luật giúp hội tụ tới tín hiệu rủi ro tốt hơn. Đây là bằng chứng định lượng cho câu hỏi "phần mờ có thực sự cần thiết không?".</a:t>
             </a:r>
           </a:p>
         </p:txBody>
@@ -6371,7 +6371,7 @@
                 <a:ea typeface="Cambria" pitchFamily="34" charset="-122"/>
                 <a:cs typeface="Cambria" pitchFamily="34" charset="-120"/>
               </a:rPr>
-              <a:t>Đánh giá trên tập Test (36.997 dòng)</a:t>
+              <a:t>Đánh giá trên tập Test (75.000 dòng)</a:t>
             </a:r>
             <a:endParaRPr lang="en-US" sz="3200" dirty="0"/>
           </a:p>
@@ -6441,7 +6441,7 @@
                 <a:ea typeface="Cambria" pitchFamily="34" charset="-122"/>
                 <a:cs typeface="Cambria" pitchFamily="34" charset="-120"/>
               </a:rPr>
-              <a:t>86.6%</a:t>
+              <a:t>87.7%</a:t>
             </a:r>
             <a:endParaRPr lang="en-US" sz="2700" dirty="0"/>
           </a:p>
@@ -6550,7 +6550,7 @@
                 <a:ea typeface="Cambria" pitchFamily="34" charset="-122"/>
                 <a:cs typeface="Cambria" pitchFamily="34" charset="-120"/>
               </a:rPr>
-              <a:t>22.3%</a:t>
+              <a:t>21.6%</a:t>
             </a:r>
             <a:endParaRPr lang="en-US" sz="2700" dirty="0"/>
           </a:p>
@@ -6659,7 +6659,7 @@
                 <a:ea typeface="Cambria" pitchFamily="34" charset="-122"/>
                 <a:cs typeface="Cambria" pitchFamily="34" charset="-120"/>
               </a:rPr>
-              <a:t>75.4%</a:t>
+              <a:t>79.5%</a:t>
             </a:r>
             <a:endParaRPr lang="en-US" sz="2700" dirty="0"/>
           </a:p>
@@ -6768,7 +6768,7 @@
                 <a:ea typeface="Cambria" pitchFamily="34" charset="-122"/>
                 <a:cs typeface="Cambria" pitchFamily="34" charset="-120"/>
               </a:rPr>
-              <a:t>9.9%</a:t>
+              <a:t>11.4%</a:t>
             </a:r>
             <a:endParaRPr lang="en-US" sz="2700" dirty="0"/>
           </a:p>
@@ -6877,7 +6877,7 @@
                 <a:ea typeface="Cambria" pitchFamily="34" charset="-122"/>
                 <a:cs typeface="Cambria" pitchFamily="34" charset="-120"/>
               </a:rPr>
-              <a:t>84.9%</a:t>
+              <a:t>84.3%</a:t>
             </a:r>
             <a:endParaRPr lang="en-US" sz="2700" dirty="0"/>
           </a:p>
@@ -6986,7 +6986,7 @@
                 <a:ea typeface="Cambria" pitchFamily="34" charset="-122"/>
                 <a:cs typeface="Cambria" pitchFamily="34" charset="-120"/>
               </a:rPr>
-              <a:t>17.7%</a:t>
+              <a:t>20.1%</a:t>
             </a:r>
             <a:endParaRPr lang="en-US" sz="2700" dirty="0"/>
           </a:p>
@@ -7067,7 +7067,7 @@
                 <a:ea typeface="Calibri" pitchFamily="34" charset="-122"/>
                 <a:cs typeface="Calibri" pitchFamily="34" charset="-120"/>
               </a:rPr>
-              <a:t>Recall cao (84.9%) — bắt được phần lớn tấn công thật.  Precision thấp (9.9%) — hệ quả của dữ liệu mất cân bằng (~3% dương) ở ngưỡng mặc định 0.5. Đổi ngưỡng theo F1 (0.823): Precision → 28.8%, F1 → 0.310.</a:t>
+              <a:t>Recall cao (84.3%) — bắt được phần lớn tấn công thật.  Precision thấp (11.4%) — hệ quả của dữ liệu mất cân bằng (~3% dương) ở ngưỡng mặc định 0.5. Đổi ngưỡng theo F1 (0.856): Precision → 28.9%, F1 → 0.322.</a:t>
             </a:r>
             <a:endParaRPr lang="en-US" sz="1400" dirty="0"/>
           </a:p>
@@ -7272,7 +7272,7 @@
                 <a:ea typeface="Cambria" pitchFamily="34" charset="-122"/>
                 <a:cs typeface="Cambria" pitchFamily="34" charset="-120"/>
               </a:rPr>
-              <a:t>+2.1%</a:t>
+              <a:t>+0.9%</a:t>
             </a:r>
             <a:endParaRPr lang="en-US" sz="2700" dirty="0"/>
           </a:p>
@@ -7381,7 +7381,7 @@
                 <a:ea typeface="Cambria" pitchFamily="34" charset="-122"/>
                 <a:cs typeface="Cambria" pitchFamily="34" charset="-120"/>
               </a:rPr>
-              <a:t>+7.5%</a:t>
+              <a:t>+1.0%</a:t>
             </a:r>
             <a:endParaRPr lang="en-US" sz="2700" dirty="0"/>
           </a:p>
@@ -7490,7 +7490,7 @@
                 <a:ea typeface="Cambria" pitchFamily="34" charset="-122"/>
                 <a:cs typeface="Cambria" pitchFamily="34" charset="-120"/>
               </a:rPr>
-              <a:t>−0.7%</a:t>
+              <a:t>+0.6%</a:t>
             </a:r>
             <a:endParaRPr lang="en-US" sz="2700" dirty="0"/>
           </a:p>
@@ -7599,7 +7599,7 @@
                 <a:ea typeface="Cambria" pitchFamily="34" charset="-122"/>
                 <a:cs typeface="Cambria" pitchFamily="34" charset="-120"/>
               </a:rPr>
-              <a:t>≈0</a:t>
+              <a:t>+0.4%</a:t>
             </a:r>
             <a:endParaRPr lang="en-US" sz="2700" dirty="0"/>
           </a:p>
@@ -7708,7 +7708,7 @@
                 <a:ea typeface="Cambria" pitchFamily="34" charset="-122"/>
                 <a:cs typeface="Cambria" pitchFamily="34" charset="-120"/>
               </a:rPr>
-              <a:t>+2.7%</a:t>
+              <a:t>+1.4%</a:t>
             </a:r>
             <a:endParaRPr lang="en-US" sz="2700" dirty="0"/>
           </a:p>
@@ -7817,7 +7817,7 @@
                 <a:ea typeface="Cambria" pitchFamily="34" charset="-122"/>
                 <a:cs typeface="Cambria" pitchFamily="34" charset="-120"/>
               </a:rPr>
-              <a:t>≈0</a:t>
+              <a:t>+0.7%</a:t>
             </a:r>
             <a:endParaRPr lang="en-US" sz="2700" dirty="0"/>
           </a:p>
@@ -7898,7 +7898,7 @@
                 <a:ea typeface="Calibri" pitchFamily="34" charset="-122"/>
                 <a:cs typeface="Calibri" pitchFamily="34" charset="-120"/>
               </a:rPr>
-              <a:t>Δ = (MLP + Mamdani FIS) − (MLP không có đặc trưng mờ), cùng mẫu 246.600 dòng và cùng seed. Đặc trưng mờ cải thiện rõ nhất ở AUPRC (+7.5%) và Recall (+2.7%) — hai chỉ số quan trọng nhất với dữ liệu lệch lớp ~3%; Accuracy/Precision gần như không đổi. Kết luận: nhánh Mamdani đóng góp thực sự vào chất lượng xếp hạng rủi ro.</a:t>
+              <a:t>Δ = (MLP + Mamdani FIS) − (MLP không có đặc trưng mờ), cùng bộ dữ liệu, cùng cách chia tập và cùng seed. Đặc trưng mờ cải thiện MỌI chỉ số, rõ nhất ở Recall (+1.4%) và AUPRC (+1.0%) — hai chỉ số quan trọng nhất với dữ liệu lệch lớp ~3%. Kết luận: nhánh Mamdani đóng góp thực sự vào chất lượng xếp hạng rủi ro.</a:t>
             </a:r>
             <a:endParaRPr lang="en-US" sz="1400" dirty="0"/>
           </a:p>
@@ -8207,7 +8207,7 @@
                 <a:ea typeface="Calibri" pitchFamily="34" charset="-122"/>
                 <a:cs typeface="Calibri" pitchFamily="34" charset="-120"/>
               </a:rPr>
-              <a:t>Train loss giảm ổn định, Val AUPRC/AUROC hội tụ trước epoch 30 (early stopping kích hoạt) → mô hình không overfitting. AUC-ROC = 0.866 cho thấy khả năng phân biệt tốt; đường Precision-Recall thấp hơn nhiều so với ROC — đúng đặc trưng của bài toán có tỷ lệ dương chỉ ~3%, nơi AUPRC phản ánh độ khó thực tế rõ hơn AUROC.</a:t>
+              <a:t>Train loss giảm ổn định, Val AUPRC/AUROC hội tụ trước epoch 30 (early stopping kích hoạt) → mô hình không overfitting. AUC-ROC = 0.877 cho thấy khả năng phân biệt tốt; đường Precision-Recall thấp hơn nhiều so với ROC — đúng đặc trưng của bài toán có tỷ lệ dương chỉ ~3%, nơi AUPRC phản ánh độ khó thực tế rõ hơn AUROC.</a:t>
             </a:r>
             <a:endParaRPr lang="en-US" sz="1400" dirty="0"/>
           </a:p>
@@ -8902,7 +8902,7 @@
                 <a:ea typeface="Calibri" pitchFamily="34" charset="-122"/>
                 <a:cs typeface="Calibri" pitchFamily="34" charset="-120"/>
               </a:rPr>
-              <a:t>Mamdani Fuzzy Inference System mã hoá tri thức chuyên gia (8 luật IF-THEN) thành đặc trưng bổ sung; MLP học phần còn lại từ dữ liệu thô. Trên 500.000 lượt đăng nhập thật, mô hình đạt AUROC 0.866 và Recall 84.9% — phát hiện được phần lớn tấn công, với đánh đổi báo động giả có thể điều chỉnh qua ngưỡng quyết định.</a:t>
+              <a:t>Mamdani Fuzzy Inference System mã hoá tri thức chuyên gia (8 luật IF-THEN) thành đặc trưng bổ sung; MLP học phần còn lại từ dữ liệu thô. Trên 500.000 lượt đăng nhập thật, mô hình đạt AUROC 0.877 và Recall 84.3% — phát hiện được phần lớn tấn công, với đánh đổi báo động giả có thể điều chỉnh qua ngưỡng quyết định.</a:t>
             </a:r>
             <a:endParaRPr lang="en-US" sz="1600" dirty="0"/>
           </a:p>
